--- a/你扶持我.pptx
+++ b/你扶持我.pptx
@@ -165,7 +165,7 @@
           <a:lstStyle/>
           <a:p>
             <a:r>
-              <a:rPr lang="en-US" altLang="zh-TW" smtClean="0"/>
+              <a:rPr lang="en-US" altLang="zh-TW"/>
               <a:t>Click to edit Master title style</a:t>
             </a:r>
             <a:endParaRPr lang="zh-TW" altLang="en-US"/>
@@ -284,7 +284,7 @@
           </a:lstStyle>
           <a:p>
             <a:r>
-              <a:rPr lang="en-US" altLang="zh-TW" smtClean="0"/>
+              <a:rPr lang="en-US" altLang="zh-TW"/>
               <a:t>Click to edit Master subtitle style</a:t>
             </a:r>
             <a:endParaRPr lang="zh-TW" altLang="en-US"/>
@@ -309,7 +309,7 @@
             <a:fld id="{948237FD-F7F8-4F7E-A8B6-ED14715790B3}" type="datetimeFigureOut">
               <a:rPr lang="zh-TW" altLang="en-US" smtClean="0"/>
               <a:pPr/>
-              <a:t>2022/8/13</a:t>
+              <a:t>2025/4/24</a:t>
             </a:fld>
             <a:endParaRPr lang="zh-TW" altLang="en-US"/>
           </a:p>
@@ -404,7 +404,7 @@
           <a:lstStyle/>
           <a:p>
             <a:r>
-              <a:rPr lang="en-US" altLang="zh-TW" smtClean="0"/>
+              <a:rPr lang="en-US" altLang="zh-TW"/>
               <a:t>Click to edit Master title style</a:t>
             </a:r>
             <a:endParaRPr lang="zh-TW" altLang="en-US"/>
@@ -428,35 +428,35 @@
           <a:p>
             <a:pPr lvl="0"/>
             <a:r>
-              <a:rPr lang="en-US" altLang="zh-TW" smtClean="0"/>
+              <a:rPr lang="en-US" altLang="zh-TW"/>
               <a:t>Edit Master text styles</a:t>
             </a:r>
           </a:p>
           <a:p>
             <a:pPr lvl="1"/>
             <a:r>
-              <a:rPr lang="en-US" altLang="zh-TW" smtClean="0"/>
+              <a:rPr lang="en-US" altLang="zh-TW"/>
               <a:t>Second level</a:t>
             </a:r>
           </a:p>
           <a:p>
             <a:pPr lvl="2"/>
             <a:r>
-              <a:rPr lang="en-US" altLang="zh-TW" smtClean="0"/>
+              <a:rPr lang="en-US" altLang="zh-TW"/>
               <a:t>Third level</a:t>
             </a:r>
           </a:p>
           <a:p>
             <a:pPr lvl="3"/>
             <a:r>
-              <a:rPr lang="en-US" altLang="zh-TW" smtClean="0"/>
+              <a:rPr lang="en-US" altLang="zh-TW"/>
               <a:t>Fourth level</a:t>
             </a:r>
           </a:p>
           <a:p>
             <a:pPr lvl="4"/>
             <a:r>
-              <a:rPr lang="en-US" altLang="zh-TW" smtClean="0"/>
+              <a:rPr lang="en-US" altLang="zh-TW"/>
               <a:t>Fifth level</a:t>
             </a:r>
             <a:endParaRPr lang="zh-TW" altLang="en-US"/>
@@ -481,7 +481,7 @@
             <a:fld id="{948237FD-F7F8-4F7E-A8B6-ED14715790B3}" type="datetimeFigureOut">
               <a:rPr lang="zh-TW" altLang="en-US" smtClean="0"/>
               <a:pPr/>
-              <a:t>2022/8/13</a:t>
+              <a:t>2025/4/24</a:t>
             </a:fld>
             <a:endParaRPr lang="zh-TW" altLang="en-US"/>
           </a:p>
@@ -581,7 +581,7 @@
           <a:lstStyle/>
           <a:p>
             <a:r>
-              <a:rPr lang="en-US" altLang="zh-TW" smtClean="0"/>
+              <a:rPr lang="en-US" altLang="zh-TW"/>
               <a:t>Click to edit Master title style</a:t>
             </a:r>
             <a:endParaRPr lang="zh-TW" altLang="en-US"/>
@@ -610,35 +610,35 @@
           <a:p>
             <a:pPr lvl="0"/>
             <a:r>
-              <a:rPr lang="en-US" altLang="zh-TW" smtClean="0"/>
+              <a:rPr lang="en-US" altLang="zh-TW"/>
               <a:t>Edit Master text styles</a:t>
             </a:r>
           </a:p>
           <a:p>
             <a:pPr lvl="1"/>
             <a:r>
-              <a:rPr lang="en-US" altLang="zh-TW" smtClean="0"/>
+              <a:rPr lang="en-US" altLang="zh-TW"/>
               <a:t>Second level</a:t>
             </a:r>
           </a:p>
           <a:p>
             <a:pPr lvl="2"/>
             <a:r>
-              <a:rPr lang="en-US" altLang="zh-TW" smtClean="0"/>
+              <a:rPr lang="en-US" altLang="zh-TW"/>
               <a:t>Third level</a:t>
             </a:r>
           </a:p>
           <a:p>
             <a:pPr lvl="3"/>
             <a:r>
-              <a:rPr lang="en-US" altLang="zh-TW" smtClean="0"/>
+              <a:rPr lang="en-US" altLang="zh-TW"/>
               <a:t>Fourth level</a:t>
             </a:r>
           </a:p>
           <a:p>
             <a:pPr lvl="4"/>
             <a:r>
-              <a:rPr lang="en-US" altLang="zh-TW" smtClean="0"/>
+              <a:rPr lang="en-US" altLang="zh-TW"/>
               <a:t>Fifth level</a:t>
             </a:r>
             <a:endParaRPr lang="zh-TW" altLang="en-US"/>
@@ -663,7 +663,7 @@
             <a:fld id="{948237FD-F7F8-4F7E-A8B6-ED14715790B3}" type="datetimeFigureOut">
               <a:rPr lang="zh-TW" altLang="en-US" smtClean="0"/>
               <a:pPr/>
-              <a:t>2022/8/13</a:t>
+              <a:t>2025/4/24</a:t>
             </a:fld>
             <a:endParaRPr lang="zh-TW" altLang="en-US"/>
           </a:p>
@@ -758,7 +758,7 @@
           <a:lstStyle/>
           <a:p>
             <a:r>
-              <a:rPr lang="en-US" altLang="zh-TW" smtClean="0"/>
+              <a:rPr lang="en-US" altLang="zh-TW"/>
               <a:t>Click to edit Master title style</a:t>
             </a:r>
             <a:endParaRPr lang="zh-TW" altLang="en-US"/>
@@ -782,35 +782,35 @@
           <a:p>
             <a:pPr lvl="0"/>
             <a:r>
-              <a:rPr lang="en-US" altLang="zh-TW" smtClean="0"/>
+              <a:rPr lang="en-US" altLang="zh-TW"/>
               <a:t>Edit Master text styles</a:t>
             </a:r>
           </a:p>
           <a:p>
             <a:pPr lvl="1"/>
             <a:r>
-              <a:rPr lang="en-US" altLang="zh-TW" smtClean="0"/>
+              <a:rPr lang="en-US" altLang="zh-TW"/>
               <a:t>Second level</a:t>
             </a:r>
           </a:p>
           <a:p>
             <a:pPr lvl="2"/>
             <a:r>
-              <a:rPr lang="en-US" altLang="zh-TW" smtClean="0"/>
+              <a:rPr lang="en-US" altLang="zh-TW"/>
               <a:t>Third level</a:t>
             </a:r>
           </a:p>
           <a:p>
             <a:pPr lvl="3"/>
             <a:r>
-              <a:rPr lang="en-US" altLang="zh-TW" smtClean="0"/>
+              <a:rPr lang="en-US" altLang="zh-TW"/>
               <a:t>Fourth level</a:t>
             </a:r>
           </a:p>
           <a:p>
             <a:pPr lvl="4"/>
             <a:r>
-              <a:rPr lang="en-US" altLang="zh-TW" smtClean="0"/>
+              <a:rPr lang="en-US" altLang="zh-TW"/>
               <a:t>Fifth level</a:t>
             </a:r>
             <a:endParaRPr lang="zh-TW" altLang="en-US"/>
@@ -835,7 +835,7 @@
             <a:fld id="{948237FD-F7F8-4F7E-A8B6-ED14715790B3}" type="datetimeFigureOut">
               <a:rPr lang="zh-TW" altLang="en-US" smtClean="0"/>
               <a:pPr/>
-              <a:t>2022/8/13</a:t>
+              <a:t>2025/4/24</a:t>
             </a:fld>
             <a:endParaRPr lang="zh-TW" altLang="en-US"/>
           </a:p>
@@ -939,7 +939,7 @@
           </a:lstStyle>
           <a:p>
             <a:r>
-              <a:rPr lang="en-US" altLang="zh-TW" smtClean="0"/>
+              <a:rPr lang="en-US" altLang="zh-TW"/>
               <a:t>Click to edit Master title style</a:t>
             </a:r>
             <a:endParaRPr lang="zh-TW" altLang="en-US"/>
@@ -1059,7 +1059,7 @@
           <a:p>
             <a:pPr lvl="0"/>
             <a:r>
-              <a:rPr lang="en-US" altLang="zh-TW" smtClean="0"/>
+              <a:rPr lang="en-US" altLang="zh-TW"/>
               <a:t>Edit Master text styles</a:t>
             </a:r>
           </a:p>
@@ -1083,7 +1083,7 @@
             <a:fld id="{948237FD-F7F8-4F7E-A8B6-ED14715790B3}" type="datetimeFigureOut">
               <a:rPr lang="zh-TW" altLang="en-US" smtClean="0"/>
               <a:pPr/>
-              <a:t>2022/8/13</a:t>
+              <a:t>2025/4/24</a:t>
             </a:fld>
             <a:endParaRPr lang="zh-TW" altLang="en-US"/>
           </a:p>
@@ -1178,7 +1178,7 @@
           <a:lstStyle/>
           <a:p>
             <a:r>
-              <a:rPr lang="en-US" altLang="zh-TW" smtClean="0"/>
+              <a:rPr lang="en-US" altLang="zh-TW"/>
               <a:t>Click to edit Master title style</a:t>
             </a:r>
             <a:endParaRPr lang="zh-TW" altLang="en-US"/>
@@ -1235,35 +1235,35 @@
           <a:p>
             <a:pPr lvl="0"/>
             <a:r>
-              <a:rPr lang="en-US" altLang="zh-TW" smtClean="0"/>
+              <a:rPr lang="en-US" altLang="zh-TW"/>
               <a:t>Edit Master text styles</a:t>
             </a:r>
           </a:p>
           <a:p>
             <a:pPr lvl="1"/>
             <a:r>
-              <a:rPr lang="en-US" altLang="zh-TW" smtClean="0"/>
+              <a:rPr lang="en-US" altLang="zh-TW"/>
               <a:t>Second level</a:t>
             </a:r>
           </a:p>
           <a:p>
             <a:pPr lvl="2"/>
             <a:r>
-              <a:rPr lang="en-US" altLang="zh-TW" smtClean="0"/>
+              <a:rPr lang="en-US" altLang="zh-TW"/>
               <a:t>Third level</a:t>
             </a:r>
           </a:p>
           <a:p>
             <a:pPr lvl="3"/>
             <a:r>
-              <a:rPr lang="en-US" altLang="zh-TW" smtClean="0"/>
+              <a:rPr lang="en-US" altLang="zh-TW"/>
               <a:t>Fourth level</a:t>
             </a:r>
           </a:p>
           <a:p>
             <a:pPr lvl="4"/>
             <a:r>
-              <a:rPr lang="en-US" altLang="zh-TW" smtClean="0"/>
+              <a:rPr lang="en-US" altLang="zh-TW"/>
               <a:t>Fifth level</a:t>
             </a:r>
             <a:endParaRPr lang="zh-TW" altLang="en-US"/>
@@ -1320,35 +1320,35 @@
           <a:p>
             <a:pPr lvl="0"/>
             <a:r>
-              <a:rPr lang="en-US" altLang="zh-TW" smtClean="0"/>
+              <a:rPr lang="en-US" altLang="zh-TW"/>
               <a:t>Edit Master text styles</a:t>
             </a:r>
           </a:p>
           <a:p>
             <a:pPr lvl="1"/>
             <a:r>
-              <a:rPr lang="en-US" altLang="zh-TW" smtClean="0"/>
+              <a:rPr lang="en-US" altLang="zh-TW"/>
               <a:t>Second level</a:t>
             </a:r>
           </a:p>
           <a:p>
             <a:pPr lvl="2"/>
             <a:r>
-              <a:rPr lang="en-US" altLang="zh-TW" smtClean="0"/>
+              <a:rPr lang="en-US" altLang="zh-TW"/>
               <a:t>Third level</a:t>
             </a:r>
           </a:p>
           <a:p>
             <a:pPr lvl="3"/>
             <a:r>
-              <a:rPr lang="en-US" altLang="zh-TW" smtClean="0"/>
+              <a:rPr lang="en-US" altLang="zh-TW"/>
               <a:t>Fourth level</a:t>
             </a:r>
           </a:p>
           <a:p>
             <a:pPr lvl="4"/>
             <a:r>
-              <a:rPr lang="en-US" altLang="zh-TW" smtClean="0"/>
+              <a:rPr lang="en-US" altLang="zh-TW"/>
               <a:t>Fifth level</a:t>
             </a:r>
             <a:endParaRPr lang="zh-TW" altLang="en-US"/>
@@ -1373,7 +1373,7 @@
             <a:fld id="{948237FD-F7F8-4F7E-A8B6-ED14715790B3}" type="datetimeFigureOut">
               <a:rPr lang="zh-TW" altLang="en-US" smtClean="0"/>
               <a:pPr/>
-              <a:t>2022/8/13</a:t>
+              <a:t>2025/4/24</a:t>
             </a:fld>
             <a:endParaRPr lang="zh-TW" altLang="en-US"/>
           </a:p>
@@ -1472,7 +1472,7 @@
           </a:lstStyle>
           <a:p>
             <a:r>
-              <a:rPr lang="en-US" altLang="zh-TW" smtClean="0"/>
+              <a:rPr lang="en-US" altLang="zh-TW"/>
               <a:t>Click to edit Master title style</a:t>
             </a:r>
             <a:endParaRPr lang="zh-TW" altLang="en-US"/>
@@ -1538,7 +1538,7 @@
           <a:p>
             <a:pPr lvl="0"/>
             <a:r>
-              <a:rPr lang="en-US" altLang="zh-TW" smtClean="0"/>
+              <a:rPr lang="en-US" altLang="zh-TW"/>
               <a:t>Edit Master text styles</a:t>
             </a:r>
           </a:p>
@@ -1594,35 +1594,35 @@
           <a:p>
             <a:pPr lvl="0"/>
             <a:r>
-              <a:rPr lang="en-US" altLang="zh-TW" smtClean="0"/>
+              <a:rPr lang="en-US" altLang="zh-TW"/>
               <a:t>Edit Master text styles</a:t>
             </a:r>
           </a:p>
           <a:p>
             <a:pPr lvl="1"/>
             <a:r>
-              <a:rPr lang="en-US" altLang="zh-TW" smtClean="0"/>
+              <a:rPr lang="en-US" altLang="zh-TW"/>
               <a:t>Second level</a:t>
             </a:r>
           </a:p>
           <a:p>
             <a:pPr lvl="2"/>
             <a:r>
-              <a:rPr lang="en-US" altLang="zh-TW" smtClean="0"/>
+              <a:rPr lang="en-US" altLang="zh-TW"/>
               <a:t>Third level</a:t>
             </a:r>
           </a:p>
           <a:p>
             <a:pPr lvl="3"/>
             <a:r>
-              <a:rPr lang="en-US" altLang="zh-TW" smtClean="0"/>
+              <a:rPr lang="en-US" altLang="zh-TW"/>
               <a:t>Fourth level</a:t>
             </a:r>
           </a:p>
           <a:p>
             <a:pPr lvl="4"/>
             <a:r>
-              <a:rPr lang="en-US" altLang="zh-TW" smtClean="0"/>
+              <a:rPr lang="en-US" altLang="zh-TW"/>
               <a:t>Fifth level</a:t>
             </a:r>
             <a:endParaRPr lang="zh-TW" altLang="en-US"/>
@@ -1688,7 +1688,7 @@
           <a:p>
             <a:pPr lvl="0"/>
             <a:r>
-              <a:rPr lang="en-US" altLang="zh-TW" smtClean="0"/>
+              <a:rPr lang="en-US" altLang="zh-TW"/>
               <a:t>Edit Master text styles</a:t>
             </a:r>
           </a:p>
@@ -1744,35 +1744,35 @@
           <a:p>
             <a:pPr lvl="0"/>
             <a:r>
-              <a:rPr lang="en-US" altLang="zh-TW" smtClean="0"/>
+              <a:rPr lang="en-US" altLang="zh-TW"/>
               <a:t>Edit Master text styles</a:t>
             </a:r>
           </a:p>
           <a:p>
             <a:pPr lvl="1"/>
             <a:r>
-              <a:rPr lang="en-US" altLang="zh-TW" smtClean="0"/>
+              <a:rPr lang="en-US" altLang="zh-TW"/>
               <a:t>Second level</a:t>
             </a:r>
           </a:p>
           <a:p>
             <a:pPr lvl="2"/>
             <a:r>
-              <a:rPr lang="en-US" altLang="zh-TW" smtClean="0"/>
+              <a:rPr lang="en-US" altLang="zh-TW"/>
               <a:t>Third level</a:t>
             </a:r>
           </a:p>
           <a:p>
             <a:pPr lvl="3"/>
             <a:r>
-              <a:rPr lang="en-US" altLang="zh-TW" smtClean="0"/>
+              <a:rPr lang="en-US" altLang="zh-TW"/>
               <a:t>Fourth level</a:t>
             </a:r>
           </a:p>
           <a:p>
             <a:pPr lvl="4"/>
             <a:r>
-              <a:rPr lang="en-US" altLang="zh-TW" smtClean="0"/>
+              <a:rPr lang="en-US" altLang="zh-TW"/>
               <a:t>Fifth level</a:t>
             </a:r>
             <a:endParaRPr lang="zh-TW" altLang="en-US"/>
@@ -1797,7 +1797,7 @@
             <a:fld id="{948237FD-F7F8-4F7E-A8B6-ED14715790B3}" type="datetimeFigureOut">
               <a:rPr lang="zh-TW" altLang="en-US" smtClean="0"/>
               <a:pPr/>
-              <a:t>2022/8/13</a:t>
+              <a:t>2025/4/24</a:t>
             </a:fld>
             <a:endParaRPr lang="zh-TW" altLang="en-US"/>
           </a:p>
@@ -1892,7 +1892,7 @@
           <a:lstStyle/>
           <a:p>
             <a:r>
-              <a:rPr lang="en-US" altLang="zh-TW" smtClean="0"/>
+              <a:rPr lang="en-US" altLang="zh-TW"/>
               <a:t>Click to edit Master title style</a:t>
             </a:r>
             <a:endParaRPr lang="zh-TW" altLang="en-US"/>
@@ -1917,7 +1917,7 @@
             <a:fld id="{948237FD-F7F8-4F7E-A8B6-ED14715790B3}" type="datetimeFigureOut">
               <a:rPr lang="zh-TW" altLang="en-US" smtClean="0"/>
               <a:pPr/>
-              <a:t>2022/8/13</a:t>
+              <a:t>2025/4/24</a:t>
             </a:fld>
             <a:endParaRPr lang="zh-TW" altLang="en-US"/>
           </a:p>
@@ -2014,7 +2014,7 @@
             <a:fld id="{948237FD-F7F8-4F7E-A8B6-ED14715790B3}" type="datetimeFigureOut">
               <a:rPr lang="zh-TW" altLang="en-US" smtClean="0"/>
               <a:pPr/>
-              <a:t>2022/8/13</a:t>
+              <a:t>2025/4/24</a:t>
             </a:fld>
             <a:endParaRPr lang="zh-TW" altLang="en-US"/>
           </a:p>
@@ -2118,7 +2118,7 @@
           </a:lstStyle>
           <a:p>
             <a:r>
-              <a:rPr lang="en-US" altLang="zh-TW" smtClean="0"/>
+              <a:rPr lang="en-US" altLang="zh-TW"/>
               <a:t>Click to edit Master title style</a:t>
             </a:r>
             <a:endParaRPr lang="zh-TW" altLang="en-US"/>
@@ -2175,35 +2175,35 @@
           <a:p>
             <a:pPr lvl="0"/>
             <a:r>
-              <a:rPr lang="en-US" altLang="zh-TW" smtClean="0"/>
+              <a:rPr lang="en-US" altLang="zh-TW"/>
               <a:t>Edit Master text styles</a:t>
             </a:r>
           </a:p>
           <a:p>
             <a:pPr lvl="1"/>
             <a:r>
-              <a:rPr lang="en-US" altLang="zh-TW" smtClean="0"/>
+              <a:rPr lang="en-US" altLang="zh-TW"/>
               <a:t>Second level</a:t>
             </a:r>
           </a:p>
           <a:p>
             <a:pPr lvl="2"/>
             <a:r>
-              <a:rPr lang="en-US" altLang="zh-TW" smtClean="0"/>
+              <a:rPr lang="en-US" altLang="zh-TW"/>
               <a:t>Third level</a:t>
             </a:r>
           </a:p>
           <a:p>
             <a:pPr lvl="3"/>
             <a:r>
-              <a:rPr lang="en-US" altLang="zh-TW" smtClean="0"/>
+              <a:rPr lang="en-US" altLang="zh-TW"/>
               <a:t>Fourth level</a:t>
             </a:r>
           </a:p>
           <a:p>
             <a:pPr lvl="4"/>
             <a:r>
-              <a:rPr lang="en-US" altLang="zh-TW" smtClean="0"/>
+              <a:rPr lang="en-US" altLang="zh-TW"/>
               <a:t>Fifth level</a:t>
             </a:r>
             <a:endParaRPr lang="zh-TW" altLang="en-US"/>
@@ -2269,7 +2269,7 @@
           <a:p>
             <a:pPr lvl="0"/>
             <a:r>
-              <a:rPr lang="en-US" altLang="zh-TW" smtClean="0"/>
+              <a:rPr lang="en-US" altLang="zh-TW"/>
               <a:t>Edit Master text styles</a:t>
             </a:r>
           </a:p>
@@ -2293,7 +2293,7 @@
             <a:fld id="{948237FD-F7F8-4F7E-A8B6-ED14715790B3}" type="datetimeFigureOut">
               <a:rPr lang="zh-TW" altLang="en-US" smtClean="0"/>
               <a:pPr/>
-              <a:t>2022/8/13</a:t>
+              <a:t>2025/4/24</a:t>
             </a:fld>
             <a:endParaRPr lang="zh-TW" altLang="en-US"/>
           </a:p>
@@ -2397,7 +2397,7 @@
           </a:lstStyle>
           <a:p>
             <a:r>
-              <a:rPr lang="en-US" altLang="zh-TW" smtClean="0"/>
+              <a:rPr lang="en-US" altLang="zh-TW"/>
               <a:t>Click to edit Master title style</a:t>
             </a:r>
             <a:endParaRPr lang="zh-TW" altLang="en-US"/>
@@ -2462,7 +2462,7 @@
           </a:lstStyle>
           <a:p>
             <a:r>
-              <a:rPr lang="en-US" altLang="zh-TW" smtClean="0"/>
+              <a:rPr lang="en-US" altLang="zh-TW"/>
               <a:t>Click icon to add picture</a:t>
             </a:r>
             <a:endParaRPr lang="zh-TW" altLang="en-US"/>
@@ -2528,7 +2528,7 @@
           <a:p>
             <a:pPr lvl="0"/>
             <a:r>
-              <a:rPr lang="en-US" altLang="zh-TW" smtClean="0"/>
+              <a:rPr lang="en-US" altLang="zh-TW"/>
               <a:t>Edit Master text styles</a:t>
             </a:r>
           </a:p>
@@ -2552,7 +2552,7 @@
             <a:fld id="{948237FD-F7F8-4F7E-A8B6-ED14715790B3}" type="datetimeFigureOut">
               <a:rPr lang="zh-TW" altLang="en-US" smtClean="0"/>
               <a:pPr/>
-              <a:t>2022/8/13</a:t>
+              <a:t>2025/4/24</a:t>
             </a:fld>
             <a:endParaRPr lang="zh-TW" altLang="en-US"/>
           </a:p>
@@ -2667,10 +2667,9 @@
           <a:lstStyle/>
           <a:p>
             <a:r>
-              <a:rPr lang="zh-TW" altLang="en-US" smtClean="0"/>
+              <a:rPr lang="zh-TW" altLang="en-US"/>
               <a:t>按一下以編輯母片標題樣式</a:t>
             </a:r>
-            <a:endParaRPr lang="zh-TW" altLang="en-US"/>
           </a:p>
         </p:txBody>
       </p:sp>
@@ -2701,38 +2700,37 @@
           <a:p>
             <a:pPr lvl="0"/>
             <a:r>
-              <a:rPr lang="zh-TW" altLang="en-US" smtClean="0"/>
+              <a:rPr lang="zh-TW" altLang="en-US"/>
               <a:t>按一下以編輯母片文字樣式</a:t>
             </a:r>
           </a:p>
           <a:p>
             <a:pPr lvl="1"/>
             <a:r>
-              <a:rPr lang="zh-TW" altLang="en-US" smtClean="0"/>
+              <a:rPr lang="zh-TW" altLang="en-US"/>
               <a:t>第二層</a:t>
             </a:r>
           </a:p>
           <a:p>
             <a:pPr lvl="2"/>
             <a:r>
-              <a:rPr lang="zh-TW" altLang="en-US" smtClean="0"/>
+              <a:rPr lang="zh-TW" altLang="en-US"/>
               <a:t>第三層</a:t>
             </a:r>
           </a:p>
           <a:p>
             <a:pPr lvl="3"/>
             <a:r>
-              <a:rPr lang="zh-TW" altLang="en-US" smtClean="0"/>
+              <a:rPr lang="zh-TW" altLang="en-US"/>
               <a:t>第四層</a:t>
             </a:r>
           </a:p>
           <a:p>
             <a:pPr lvl="4"/>
             <a:r>
-              <a:rPr lang="zh-TW" altLang="en-US" smtClean="0"/>
+              <a:rPr lang="zh-TW" altLang="en-US"/>
               <a:t>第五層</a:t>
             </a:r>
-            <a:endParaRPr lang="zh-TW" altLang="en-US"/>
           </a:p>
         </p:txBody>
       </p:sp>
@@ -2772,7 +2770,7 @@
             <a:fld id="{948237FD-F7F8-4F7E-A8B6-ED14715790B3}" type="datetimeFigureOut">
               <a:rPr lang="zh-TW" altLang="en-US" smtClean="0"/>
               <a:pPr/>
-              <a:t>2022/8/13</a:t>
+              <a:t>2025/4/24</a:t>
             </a:fld>
             <a:endParaRPr lang="zh-TW" altLang="en-US"/>
           </a:p>
@@ -3185,7 +3183,7 @@
                 <a:latin typeface="微軟正黑體" pitchFamily="34" charset="-120"/>
                 <a:ea typeface="微軟正黑體" pitchFamily="34" charset="-120"/>
               </a:rPr>
-              <a:t>袮</a:t>
+              <a:t>祢</a:t>
             </a:r>
             <a:r>
               <a:rPr lang="zh-TW" altLang="en-US" sz="7200" b="1" i="1" dirty="0">
@@ -3202,24 +3200,7 @@
                 <a:latin typeface="微軟正黑體" pitchFamily="34" charset="-120"/>
                 <a:ea typeface="微軟正黑體" pitchFamily="34" charset="-120"/>
               </a:rPr>
-              <a:t>扶</a:t>
-            </a:r>
-            <a:r>
-              <a:rPr lang="zh-TW" altLang="en-US" sz="7200" b="1" i="1" dirty="0">
-                <a:solidFill>
-                  <a:srgbClr val="660033"/>
-                </a:solidFill>
-                <a:effectLst>
-                  <a:outerShdw blurRad="38100" dist="38100" dir="2700000" algn="tl">
-                    <a:srgbClr val="000000">
-                      <a:alpha val="43137"/>
-                    </a:srgbClr>
-                  </a:outerShdw>
-                </a:effectLst>
-                <a:latin typeface="微軟正黑體" pitchFamily="34" charset="-120"/>
-                <a:ea typeface="微軟正黑體" pitchFamily="34" charset="-120"/>
-              </a:rPr>
-              <a:t>持我</a:t>
+              <a:t>扶持我</a:t>
             </a:r>
           </a:p>
         </p:txBody>
@@ -3330,7 +3311,7 @@
         <p:spPr>
           <a:xfrm>
             <a:off x="0" y="5157192"/>
-            <a:ext cx="12192000" cy="748988"/>
+            <a:ext cx="12192000" cy="646331"/>
           </a:xfrm>
           <a:prstGeom prst="rect">
             <a:avLst/>
@@ -3345,7 +3326,7 @@
           <a:p>
             <a:pPr algn="ctr"/>
             <a:r>
-              <a:rPr lang="en-US" sz="4267" b="1" dirty="0">
+              <a:rPr lang="en-US" sz="3600" b="1" dirty="0">
                 <a:solidFill>
                   <a:srgbClr val="660033"/>
                 </a:solidFill>
@@ -3355,17 +3336,17 @@
               <a:t>( </a:t>
             </a:r>
             <a:r>
-              <a:rPr lang="zh-CN" altLang="en-US" sz="4267" b="1" dirty="0">
+              <a:rPr lang="zh-CN" altLang="en-US" sz="3600" b="1" dirty="0">
                 <a:solidFill>
                   <a:srgbClr val="660033"/>
                 </a:solidFill>
                 <a:latin typeface="Microsoft JhengHei" panose="020B0604030504040204" pitchFamily="34" charset="-120"/>
                 <a:ea typeface="Microsoft JhengHei" panose="020B0604030504040204" pitchFamily="34" charset="-120"/>
               </a:rPr>
-              <a:t>正</a:t>
-            </a:r>
-            <a:r>
-              <a:rPr lang="en-US" sz="4267" b="1" dirty="0">
+              <a:t>正歌</a:t>
+            </a:r>
+            <a:r>
+              <a:rPr lang="en-US" sz="3600" b="1" dirty="0">
                 <a:solidFill>
                   <a:srgbClr val="660033"/>
                 </a:solidFill>
@@ -3374,7 +3355,7 @@
               </a:rPr>
               <a:t> )</a:t>
             </a:r>
-            <a:endParaRPr lang="vi-VN" sz="4267" b="1" dirty="0">
+            <a:endParaRPr lang="vi-VN" sz="3600" b="1" dirty="0">
               <a:solidFill>
                 <a:srgbClr val="660033"/>
               </a:solidFill>
@@ -3489,7 +3470,7 @@
         <p:spPr>
           <a:xfrm>
             <a:off x="0" y="5157192"/>
-            <a:ext cx="12192000" cy="748988"/>
+            <a:ext cx="12192000" cy="646331"/>
           </a:xfrm>
           <a:prstGeom prst="rect">
             <a:avLst/>
@@ -3504,7 +3485,7 @@
           <a:p>
             <a:pPr algn="ctr"/>
             <a:r>
-              <a:rPr lang="en-US" sz="4267" b="1" dirty="0">
+              <a:rPr lang="en-US" sz="3600" b="1" dirty="0">
                 <a:solidFill>
                   <a:srgbClr val="660033"/>
                 </a:solidFill>
@@ -3514,17 +3495,17 @@
               <a:t>( </a:t>
             </a:r>
             <a:r>
-              <a:rPr lang="zh-CN" altLang="en-US" sz="4267" b="1" dirty="0">
+              <a:rPr lang="zh-CN" altLang="en-US" sz="3600" b="1" dirty="0">
                 <a:solidFill>
                   <a:srgbClr val="660033"/>
                 </a:solidFill>
                 <a:latin typeface="Microsoft JhengHei" panose="020B0604030504040204" pitchFamily="34" charset="-120"/>
                 <a:ea typeface="Microsoft JhengHei" panose="020B0604030504040204" pitchFamily="34" charset="-120"/>
               </a:rPr>
-              <a:t>正</a:t>
-            </a:r>
-            <a:r>
-              <a:rPr lang="en-US" sz="4267" b="1" dirty="0">
+              <a:t>正歌</a:t>
+            </a:r>
+            <a:r>
+              <a:rPr lang="en-US" sz="3600" b="1" dirty="0">
                 <a:solidFill>
                   <a:srgbClr val="660033"/>
                 </a:solidFill>
@@ -3533,7 +3514,7 @@
               </a:rPr>
               <a:t> )</a:t>
             </a:r>
-            <a:endParaRPr lang="vi-VN" sz="4267" b="1" dirty="0">
+            <a:endParaRPr lang="vi-VN" sz="3600" b="1" dirty="0">
               <a:solidFill>
                 <a:srgbClr val="660033"/>
               </a:solidFill>
@@ -3648,7 +3629,7 @@
         <p:spPr>
           <a:xfrm>
             <a:off x="0" y="5157192"/>
-            <a:ext cx="12192000" cy="748988"/>
+            <a:ext cx="12192000" cy="646331"/>
           </a:xfrm>
           <a:prstGeom prst="rect">
             <a:avLst/>
@@ -3663,7 +3644,7 @@
           <a:p>
             <a:pPr algn="ctr"/>
             <a:r>
-              <a:rPr lang="en-US" sz="4267" b="1" dirty="0">
+              <a:rPr lang="en-US" sz="3600" b="1" dirty="0">
                 <a:solidFill>
                   <a:srgbClr val="660033"/>
                 </a:solidFill>
@@ -3673,17 +3654,17 @@
               <a:t>( </a:t>
             </a:r>
             <a:r>
-              <a:rPr lang="zh-CN" altLang="en-US" sz="4267" b="1" dirty="0">
+              <a:rPr lang="zh-CN" altLang="en-US" sz="3600" b="1" dirty="0">
                 <a:solidFill>
                   <a:srgbClr val="660033"/>
                 </a:solidFill>
                 <a:latin typeface="Microsoft JhengHei" panose="020B0604030504040204" pitchFamily="34" charset="-120"/>
                 <a:ea typeface="Microsoft JhengHei" panose="020B0604030504040204" pitchFamily="34" charset="-120"/>
               </a:rPr>
-              <a:t>副</a:t>
-            </a:r>
-            <a:r>
-              <a:rPr lang="en-US" sz="4267" b="1" dirty="0">
+              <a:t>副歌</a:t>
+            </a:r>
+            <a:r>
+              <a:rPr lang="en-US" sz="3600" b="1" dirty="0">
                 <a:solidFill>
                   <a:srgbClr val="660033"/>
                 </a:solidFill>
@@ -3692,7 +3673,7 @@
               </a:rPr>
               <a:t> )</a:t>
             </a:r>
-            <a:endParaRPr lang="vi-VN" sz="4267" b="1" dirty="0">
+            <a:endParaRPr lang="vi-VN" sz="3600" b="1" dirty="0">
               <a:solidFill>
                 <a:srgbClr val="660033"/>
               </a:solidFill>
@@ -3807,7 +3788,7 @@
         <p:spPr>
           <a:xfrm>
             <a:off x="0" y="5157192"/>
-            <a:ext cx="12192000" cy="748988"/>
+            <a:ext cx="12192000" cy="646331"/>
           </a:xfrm>
           <a:prstGeom prst="rect">
             <a:avLst/>
@@ -3822,7 +3803,7 @@
           <a:p>
             <a:pPr algn="ctr"/>
             <a:r>
-              <a:rPr lang="en-US" sz="4267" b="1" dirty="0">
+              <a:rPr lang="en-US" sz="3600" b="1" dirty="0">
                 <a:solidFill>
                   <a:srgbClr val="660033"/>
                 </a:solidFill>
@@ -3832,17 +3813,17 @@
               <a:t>( </a:t>
             </a:r>
             <a:r>
-              <a:rPr lang="zh-CN" altLang="en-US" sz="4267" b="1" dirty="0">
+              <a:rPr lang="zh-CN" altLang="en-US" sz="3600" b="1" dirty="0">
                 <a:solidFill>
                   <a:srgbClr val="660033"/>
                 </a:solidFill>
                 <a:latin typeface="Microsoft JhengHei" panose="020B0604030504040204" pitchFamily="34" charset="-120"/>
                 <a:ea typeface="Microsoft JhengHei" panose="020B0604030504040204" pitchFamily="34" charset="-120"/>
               </a:rPr>
-              <a:t>副</a:t>
-            </a:r>
-            <a:r>
-              <a:rPr lang="en-US" sz="4267" b="1" dirty="0">
+              <a:t>副歌</a:t>
+            </a:r>
+            <a:r>
+              <a:rPr lang="en-US" sz="3600" b="1" dirty="0">
                 <a:solidFill>
                   <a:srgbClr val="660033"/>
                 </a:solidFill>
@@ -3851,7 +3832,7 @@
               </a:rPr>
               <a:t> )</a:t>
             </a:r>
-            <a:endParaRPr lang="vi-VN" sz="4267" b="1" dirty="0">
+            <a:endParaRPr lang="vi-VN" sz="3600" b="1" dirty="0">
               <a:solidFill>
                 <a:srgbClr val="660033"/>
               </a:solidFill>
